--- a/bright-17-story-market.pptx
+++ b/bright-17-story-market.pptx
@@ -3088,20 +3088,12 @@
         <p:nvPr/>
       </p:nvGrpSpPr>
       <p:grpSpPr/>
-      <p:pic>
-        <p:nvPicPr>
-          <p:cNvPr id="2" name="Picture 1" descr="bright-17-story-market.png"/>
-          <p:cNvPicPr>
-            <a:picLocks noChangeAspect="1"/>
-          </p:cNvPicPr>
+      <p:sp>
+        <p:nvSpPr>
+          <p:cNvPr id="2" name="Rectangle 1"/>
+          <p:cNvSpPr/>
           <p:nvPr/>
-        </p:nvPicPr>
-        <p:blipFill>
-          <a:blip r:embed="rId2"/>
-          <a:stretch>
-            <a:fillRect/>
-          </a:stretch>
-        </p:blipFill>
+        </p:nvSpPr>
         <p:spPr>
           <a:xfrm>
             <a:off x="0" y="0"/>
@@ -3110,8 +3102,886 @@
           <a:prstGeom prst="rect">
             <a:avLst/>
           </a:prstGeom>
-        </p:spPr>
-      </p:pic>
+          <a:solidFill>
+            <a:srgbClr val="FBFAF7"/>
+          </a:solidFill>
+          <a:ln>
+            <a:noFill/>
+          </a:ln>
+          <a:effectLst/>
+        </p:spPr>
+        <p:style>
+          <a:lnRef idx="1">
+            <a:schemeClr val="accent1"/>
+          </a:lnRef>
+          <a:fillRef idx="3">
+            <a:schemeClr val="accent1"/>
+          </a:fillRef>
+          <a:effectRef idx="2">
+            <a:schemeClr val="accent1"/>
+          </a:effectRef>
+          <a:fontRef idx="minor">
+            <a:schemeClr val="lt1"/>
+          </a:fontRef>
+        </p:style>
+        <p:txBody>
+          <a:bodyPr rtlCol="0" anchor="ctr"/>
+          <a:lstStyle/>
+          <a:p>
+            <a:pPr algn="ctr"/>
+          </a:p>
+        </p:txBody>
+      </p:sp>
+      <p:sp>
+        <p:nvSpPr>
+          <p:cNvPr id="3" name="Rectangle 2"/>
+          <p:cNvSpPr/>
+          <p:nvPr/>
+        </p:nvSpPr>
+        <p:spPr>
+          <a:xfrm>
+            <a:off x="857250" y="1504950"/>
+            <a:ext cx="8572500" cy="9525"/>
+          </a:xfrm>
+          <a:prstGeom prst="rect">
+            <a:avLst/>
+          </a:prstGeom>
+          <a:solidFill>
+            <a:srgbClr val="C4CDBC"/>
+          </a:solidFill>
+          <a:ln>
+            <a:noFill/>
+          </a:ln>
+          <a:effectLst/>
+        </p:spPr>
+        <p:style>
+          <a:lnRef idx="1">
+            <a:schemeClr val="accent1"/>
+          </a:lnRef>
+          <a:fillRef idx="3">
+            <a:schemeClr val="accent1"/>
+          </a:fillRef>
+          <a:effectRef idx="2">
+            <a:schemeClr val="accent1"/>
+          </a:effectRef>
+          <a:fontRef idx="minor">
+            <a:schemeClr val="lt1"/>
+          </a:fontRef>
+        </p:style>
+        <p:txBody>
+          <a:bodyPr rtlCol="0" anchor="ctr"/>
+          <a:lstStyle/>
+          <a:p>
+            <a:pPr algn="ctr"/>
+          </a:p>
+        </p:txBody>
+      </p:sp>
+      <p:sp>
+        <p:nvSpPr>
+          <p:cNvPr id="4" name="Oval 3"/>
+          <p:cNvSpPr/>
+          <p:nvPr/>
+        </p:nvSpPr>
+        <p:spPr>
+          <a:xfrm>
+            <a:off x="857250" y="866775"/>
+            <a:ext cx="381000" cy="381000"/>
+          </a:xfrm>
+          <a:prstGeom prst="ellipse">
+            <a:avLst/>
+          </a:prstGeom>
+          <a:noFill/>
+          <a:ln w="9525">
+            <a:solidFill>
+              <a:srgbClr val="97A98C"/>
+            </a:solidFill>
+          </a:ln>
+          <a:effectLst/>
+        </p:spPr>
+        <p:style>
+          <a:lnRef idx="1">
+            <a:schemeClr val="accent1"/>
+          </a:lnRef>
+          <a:fillRef idx="3">
+            <a:schemeClr val="accent1"/>
+          </a:fillRef>
+          <a:effectRef idx="2">
+            <a:schemeClr val="accent1"/>
+          </a:effectRef>
+          <a:fontRef idx="minor">
+            <a:schemeClr val="lt1"/>
+          </a:fontRef>
+        </p:style>
+        <p:txBody>
+          <a:bodyPr rtlCol="0" anchor="ctr"/>
+          <a:lstStyle/>
+          <a:p>
+            <a:pPr algn="ctr"/>
+          </a:p>
+        </p:txBody>
+      </p:sp>
+      <p:sp>
+        <p:nvSpPr>
+          <p:cNvPr id="5" name="Rectangle 4"/>
+          <p:cNvSpPr/>
+          <p:nvPr/>
+        </p:nvSpPr>
+        <p:spPr>
+          <a:xfrm>
+            <a:off x="3471118" y="5457825"/>
+            <a:ext cx="666750" cy="9525"/>
+          </a:xfrm>
+          <a:prstGeom prst="rect">
+            <a:avLst/>
+          </a:prstGeom>
+          <a:solidFill>
+            <a:srgbClr val="97A98C"/>
+          </a:solidFill>
+          <a:ln>
+            <a:noFill/>
+          </a:ln>
+          <a:effectLst/>
+        </p:spPr>
+        <p:style>
+          <a:lnRef idx="1">
+            <a:schemeClr val="accent1"/>
+          </a:lnRef>
+          <a:fillRef idx="3">
+            <a:schemeClr val="accent1"/>
+          </a:fillRef>
+          <a:effectRef idx="2">
+            <a:schemeClr val="accent1"/>
+          </a:effectRef>
+          <a:fontRef idx="minor">
+            <a:schemeClr val="lt1"/>
+          </a:fontRef>
+        </p:style>
+        <p:txBody>
+          <a:bodyPr rtlCol="0" anchor="ctr"/>
+          <a:lstStyle/>
+          <a:p>
+            <a:pPr algn="ctr"/>
+          </a:p>
+        </p:txBody>
+      </p:sp>
+      <p:sp>
+        <p:nvSpPr>
+          <p:cNvPr id="6" name="Rectangle 5"/>
+          <p:cNvSpPr/>
+          <p:nvPr/>
+        </p:nvSpPr>
+        <p:spPr>
+          <a:xfrm>
+            <a:off x="6148983" y="5457825"/>
+            <a:ext cx="666750" cy="9525"/>
+          </a:xfrm>
+          <a:prstGeom prst="rect">
+            <a:avLst/>
+          </a:prstGeom>
+          <a:solidFill>
+            <a:srgbClr val="97A98C"/>
+          </a:solidFill>
+          <a:ln>
+            <a:noFill/>
+          </a:ln>
+          <a:effectLst/>
+        </p:spPr>
+        <p:style>
+          <a:lnRef idx="1">
+            <a:schemeClr val="accent1"/>
+          </a:lnRef>
+          <a:fillRef idx="3">
+            <a:schemeClr val="accent1"/>
+          </a:fillRef>
+          <a:effectRef idx="2">
+            <a:schemeClr val="accent1"/>
+          </a:effectRef>
+          <a:fontRef idx="minor">
+            <a:schemeClr val="lt1"/>
+          </a:fontRef>
+        </p:style>
+        <p:txBody>
+          <a:bodyPr rtlCol="0" anchor="ctr"/>
+          <a:lstStyle/>
+          <a:p>
+            <a:pPr algn="ctr"/>
+          </a:p>
+        </p:txBody>
+      </p:sp>
+      <p:sp>
+        <p:nvSpPr>
+          <p:cNvPr id="7" name="Rectangle 6"/>
+          <p:cNvSpPr/>
+          <p:nvPr/>
+        </p:nvSpPr>
+        <p:spPr>
+          <a:xfrm>
+            <a:off x="3925788" y="16535400"/>
+            <a:ext cx="2435423" cy="9525"/>
+          </a:xfrm>
+          <a:prstGeom prst="rect">
+            <a:avLst/>
+          </a:prstGeom>
+          <a:solidFill>
+            <a:srgbClr val="97A98C"/>
+          </a:solidFill>
+          <a:ln>
+            <a:noFill/>
+          </a:ln>
+          <a:effectLst/>
+        </p:spPr>
+        <p:style>
+          <a:lnRef idx="1">
+            <a:schemeClr val="accent1"/>
+          </a:lnRef>
+          <a:fillRef idx="3">
+            <a:schemeClr val="accent1"/>
+          </a:fillRef>
+          <a:effectRef idx="2">
+            <a:schemeClr val="accent1"/>
+          </a:effectRef>
+          <a:fontRef idx="minor">
+            <a:schemeClr val="lt1"/>
+          </a:fontRef>
+        </p:style>
+        <p:txBody>
+          <a:bodyPr rtlCol="0" anchor="ctr"/>
+          <a:lstStyle/>
+          <a:p>
+            <a:pPr algn="ctr"/>
+          </a:p>
+        </p:txBody>
+      </p:sp>
+      <p:sp>
+        <p:nvSpPr>
+          <p:cNvPr id="8" name="Rectangle 7"/>
+          <p:cNvSpPr/>
+          <p:nvPr/>
+        </p:nvSpPr>
+        <p:spPr>
+          <a:xfrm>
+            <a:off x="3925788" y="17021175"/>
+            <a:ext cx="2435423" cy="9525"/>
+          </a:xfrm>
+          <a:prstGeom prst="rect">
+            <a:avLst/>
+          </a:prstGeom>
+          <a:solidFill>
+            <a:srgbClr val="97A98C"/>
+          </a:solidFill>
+          <a:ln>
+            <a:noFill/>
+          </a:ln>
+          <a:effectLst/>
+        </p:spPr>
+        <p:style>
+          <a:lnRef idx="1">
+            <a:schemeClr val="accent1"/>
+          </a:lnRef>
+          <a:fillRef idx="3">
+            <a:schemeClr val="accent1"/>
+          </a:fillRef>
+          <a:effectRef idx="2">
+            <a:schemeClr val="accent1"/>
+          </a:effectRef>
+          <a:fontRef idx="minor">
+            <a:schemeClr val="lt1"/>
+          </a:fontRef>
+        </p:style>
+        <p:txBody>
+          <a:bodyPr rtlCol="0" anchor="ctr"/>
+          <a:lstStyle/>
+          <a:p>
+            <a:pPr algn="ctr"/>
+          </a:p>
+        </p:txBody>
+      </p:sp>
+      <p:sp>
+        <p:nvSpPr>
+          <p:cNvPr id="9" name="Rectangle 8"/>
+          <p:cNvSpPr/>
+          <p:nvPr/>
+        </p:nvSpPr>
+        <p:spPr>
+          <a:xfrm>
+            <a:off x="3925788" y="16535400"/>
+            <a:ext cx="9525" cy="495300"/>
+          </a:xfrm>
+          <a:prstGeom prst="rect">
+            <a:avLst/>
+          </a:prstGeom>
+          <a:solidFill>
+            <a:srgbClr val="97A98C"/>
+          </a:solidFill>
+          <a:ln>
+            <a:noFill/>
+          </a:ln>
+          <a:effectLst/>
+        </p:spPr>
+        <p:style>
+          <a:lnRef idx="1">
+            <a:schemeClr val="accent1"/>
+          </a:lnRef>
+          <a:fillRef idx="3">
+            <a:schemeClr val="accent1"/>
+          </a:fillRef>
+          <a:effectRef idx="2">
+            <a:schemeClr val="accent1"/>
+          </a:effectRef>
+          <a:fontRef idx="minor">
+            <a:schemeClr val="lt1"/>
+          </a:fontRef>
+        </p:style>
+        <p:txBody>
+          <a:bodyPr rtlCol="0" anchor="ctr"/>
+          <a:lstStyle/>
+          <a:p>
+            <a:pPr algn="ctr"/>
+          </a:p>
+        </p:txBody>
+      </p:sp>
+      <p:sp>
+        <p:nvSpPr>
+          <p:cNvPr id="10" name="Rectangle 9"/>
+          <p:cNvSpPr/>
+          <p:nvPr/>
+        </p:nvSpPr>
+        <p:spPr>
+          <a:xfrm>
+            <a:off x="6351687" y="16535400"/>
+            <a:ext cx="9525" cy="495300"/>
+          </a:xfrm>
+          <a:prstGeom prst="rect">
+            <a:avLst/>
+          </a:prstGeom>
+          <a:solidFill>
+            <a:srgbClr val="97A98C"/>
+          </a:solidFill>
+          <a:ln>
+            <a:noFill/>
+          </a:ln>
+          <a:effectLst/>
+        </p:spPr>
+        <p:style>
+          <a:lnRef idx="1">
+            <a:schemeClr val="accent1"/>
+          </a:lnRef>
+          <a:fillRef idx="3">
+            <a:schemeClr val="accent1"/>
+          </a:fillRef>
+          <a:effectRef idx="2">
+            <a:schemeClr val="accent1"/>
+          </a:effectRef>
+          <a:fontRef idx="minor">
+            <a:schemeClr val="lt1"/>
+          </a:fontRef>
+        </p:style>
+        <p:txBody>
+          <a:bodyPr rtlCol="0" anchor="ctr"/>
+          <a:lstStyle/>
+          <a:p>
+            <a:pPr algn="ctr"/>
+          </a:p>
+        </p:txBody>
+      </p:sp>
+      <p:sp>
+        <p:nvSpPr>
+          <p:cNvPr id="11" name="TextBox 10"/>
+          <p:cNvSpPr txBox="1"/>
+          <p:nvPr/>
+        </p:nvSpPr>
+        <p:spPr>
+          <a:xfrm>
+            <a:off x="919162" y="971550"/>
+            <a:ext cx="792480" cy="171450"/>
+          </a:xfrm>
+          <a:prstGeom prst="rect">
+            <a:avLst/>
+          </a:prstGeom>
+          <a:noFill/>
+        </p:spPr>
+        <p:txBody>
+          <a:bodyPr wrap="none" anchor="t" lIns="0" rIns="0" tIns="0" bIns="0"/>
+          <a:lstStyle/>
+          <a:p>
+            <a:pPr algn="l">
+              <a:lnSpc>
+                <a:spcPct val="100000"/>
+              </a:lnSpc>
+            </a:pPr>
+            <a:r>
+              <a:rPr sz="1350" i="0" b="0">
+                <a:solidFill>
+                  <a:srgbClr val="97A98C"/>
+                </a:solidFill>
+                <a:latin typeface="Cormorant Garamond"/>
+                <a:ea typeface="Cormorant Garamond"/>
+                <a:cs typeface="Cormorant Garamond"/>
+              </a:rPr>
+              <a:t>ME</a:t>
+            </a:r>
+          </a:p>
+        </p:txBody>
+      </p:sp>
+      <p:sp>
+        <p:nvSpPr>
+          <p:cNvPr id="12" name="TextBox 11"/>
+          <p:cNvSpPr txBox="1"/>
+          <p:nvPr/>
+        </p:nvSpPr>
+        <p:spPr>
+          <a:xfrm>
+            <a:off x="1390650" y="857250"/>
+            <a:ext cx="3282315" cy="228600"/>
+          </a:xfrm>
+          <a:prstGeom prst="rect">
+            <a:avLst/>
+          </a:prstGeom>
+          <a:noFill/>
+        </p:spPr>
+        <p:txBody>
+          <a:bodyPr wrap="none" anchor="t" lIns="0" rIns="0" tIns="0" bIns="0"/>
+          <a:lstStyle/>
+          <a:p>
+            <a:pPr algn="l">
+              <a:lnSpc>
+                <a:spcPct val="100000"/>
+              </a:lnSpc>
+            </a:pPr>
+            <a:r>
+              <a:rPr sz="1800" i="0" b="0">
+                <a:solidFill>
+                  <a:srgbClr val="33322E"/>
+                </a:solidFill>
+                <a:latin typeface="Cormorant Garamond"/>
+                <a:ea typeface="Cormorant Garamond"/>
+                <a:cs typeface="Cormorant Garamond"/>
+              </a:rPr>
+              <a:t>Maya Ellison</a:t>
+            </a:r>
+          </a:p>
+        </p:txBody>
+      </p:sp>
+      <p:sp>
+        <p:nvSpPr>
+          <p:cNvPr id="13" name="TextBox 12"/>
+          <p:cNvSpPr txBox="1"/>
+          <p:nvPr/>
+        </p:nvSpPr>
+        <p:spPr>
+          <a:xfrm>
+            <a:off x="1390650" y="1133475"/>
+            <a:ext cx="3282315" cy="123825"/>
+          </a:xfrm>
+          <a:prstGeom prst="rect">
+            <a:avLst/>
+          </a:prstGeom>
+          <a:noFill/>
+        </p:spPr>
+        <p:txBody>
+          <a:bodyPr wrap="none" anchor="t" lIns="0" rIns="0" tIns="0" bIns="0"/>
+          <a:lstStyle/>
+          <a:p>
+            <a:pPr algn="l"/>
+            <a:r>
+              <a:rPr sz="637" i="0" b="0" spc="216">
+                <a:solidFill>
+                  <a:srgbClr val="8A867E"/>
+                </a:solidFill>
+                <a:latin typeface="Poppins"/>
+                <a:ea typeface="Poppins"/>
+                <a:cs typeface="Poppins"/>
+              </a:rPr>
+              <a:t>REALTOR®  |  MODERN LIVING</a:t>
+            </a:r>
+          </a:p>
+        </p:txBody>
+      </p:sp>
+      <p:sp>
+        <p:nvSpPr>
+          <p:cNvPr id="14" name="TextBox 13"/>
+          <p:cNvSpPr txBox="1"/>
+          <p:nvPr/>
+        </p:nvSpPr>
+        <p:spPr>
+          <a:xfrm>
+            <a:off x="3648834" y="5376862"/>
+            <a:ext cx="2989183" cy="171450"/>
+          </a:xfrm>
+          <a:prstGeom prst="rect">
+            <a:avLst/>
+          </a:prstGeom>
+          <a:noFill/>
+        </p:spPr>
+        <p:txBody>
+          <a:bodyPr wrap="none" anchor="t" lIns="0" rIns="0" tIns="0" bIns="0"/>
+          <a:lstStyle/>
+          <a:p>
+            <a:pPr algn="ctr"/>
+            <a:r>
+              <a:rPr sz="937" i="0" b="0" spc="412">
+                <a:solidFill>
+                  <a:srgbClr val="97A98C"/>
+                </a:solidFill>
+                <a:latin typeface="Poppins"/>
+                <a:ea typeface="Poppins"/>
+                <a:cs typeface="Poppins"/>
+              </a:rPr>
+              <a:t>MARKET UPDATE</a:t>
+            </a:r>
+          </a:p>
+        </p:txBody>
+      </p:sp>
+      <p:sp>
+        <p:nvSpPr>
+          <p:cNvPr id="15" name="TextBox 14"/>
+          <p:cNvSpPr txBox="1"/>
+          <p:nvPr/>
+        </p:nvSpPr>
+        <p:spPr>
+          <a:xfrm>
+            <a:off x="-1905000" y="5891212"/>
+            <a:ext cx="14097000" cy="923925"/>
+          </a:xfrm>
+          <a:prstGeom prst="rect">
+            <a:avLst/>
+          </a:prstGeom>
+          <a:noFill/>
+        </p:spPr>
+        <p:txBody>
+          <a:bodyPr wrap="none" anchor="t" lIns="0" rIns="0" tIns="0" bIns="0"/>
+          <a:lstStyle/>
+          <a:p>
+            <a:pPr algn="ctr"/>
+            <a:r>
+              <a:rPr sz="6300" i="0" b="0">
+                <a:solidFill>
+                  <a:srgbClr val="33322E"/>
+                </a:solidFill>
+                <a:latin typeface="Cormorant Garamond"/>
+                <a:ea typeface="Cormorant Garamond"/>
+                <a:cs typeface="Cormorant Garamond"/>
+              </a:rPr>
+              <a:t>Austin, TX</a:t>
+            </a:r>
+          </a:p>
+        </p:txBody>
+      </p:sp>
+      <p:sp>
+        <p:nvSpPr>
+          <p:cNvPr id="16" name="TextBox 15"/>
+          <p:cNvSpPr txBox="1"/>
+          <p:nvPr/>
+        </p:nvSpPr>
+        <p:spPr>
+          <a:xfrm>
+            <a:off x="-1905000" y="6910388"/>
+            <a:ext cx="14097000" cy="171450"/>
+          </a:xfrm>
+          <a:prstGeom prst="rect">
+            <a:avLst/>
+          </a:prstGeom>
+          <a:noFill/>
+        </p:spPr>
+        <p:txBody>
+          <a:bodyPr wrap="none" anchor="t" lIns="0" rIns="0" tIns="0" bIns="0"/>
+          <a:lstStyle/>
+          <a:p>
+            <a:pPr algn="ctr"/>
+            <a:r>
+              <a:rPr sz="900" i="0" b="0" spc="270">
+                <a:solidFill>
+                  <a:srgbClr val="8A867E"/>
+                </a:solidFill>
+                <a:latin typeface="Poppins"/>
+                <a:ea typeface="Poppins"/>
+                <a:cs typeface="Poppins"/>
+              </a:rPr>
+              <a:t>JUNE 2026</a:t>
+            </a:r>
+          </a:p>
+        </p:txBody>
+      </p:sp>
+      <p:sp>
+        <p:nvSpPr>
+          <p:cNvPr id="17" name="TextBox 16"/>
+          <p:cNvSpPr txBox="1"/>
+          <p:nvPr/>
+        </p:nvSpPr>
+        <p:spPr>
+          <a:xfrm>
+            <a:off x="-1905000" y="7653338"/>
+            <a:ext cx="14097000" cy="704850"/>
+          </a:xfrm>
+          <a:prstGeom prst="rect">
+            <a:avLst/>
+          </a:prstGeom>
+          <a:noFill/>
+        </p:spPr>
+        <p:txBody>
+          <a:bodyPr wrap="none" anchor="t" lIns="0" rIns="0" tIns="0" bIns="0"/>
+          <a:lstStyle/>
+          <a:p>
+            <a:pPr algn="ctr"/>
+            <a:r>
+              <a:rPr sz="4800" i="0" b="0">
+                <a:solidFill>
+                  <a:srgbClr val="97A98C"/>
+                </a:solidFill>
+                <a:latin typeface="Cormorant Garamond"/>
+                <a:ea typeface="Cormorant Garamond"/>
+                <a:cs typeface="Cormorant Garamond"/>
+              </a:rPr>
+              <a:t>$612K</a:t>
+            </a:r>
+          </a:p>
+        </p:txBody>
+      </p:sp>
+      <p:sp>
+        <p:nvSpPr>
+          <p:cNvPr id="18" name="TextBox 17"/>
+          <p:cNvSpPr txBox="1"/>
+          <p:nvPr/>
+        </p:nvSpPr>
+        <p:spPr>
+          <a:xfrm>
+            <a:off x="-1905000" y="8396288"/>
+            <a:ext cx="14097000" cy="161925"/>
+          </a:xfrm>
+          <a:prstGeom prst="rect">
+            <a:avLst/>
+          </a:prstGeom>
+          <a:noFill/>
+        </p:spPr>
+        <p:txBody>
+          <a:bodyPr wrap="none" anchor="t" lIns="0" rIns="0" tIns="0" bIns="0"/>
+          <a:lstStyle/>
+          <a:p>
+            <a:pPr algn="ctr"/>
+            <a:r>
+              <a:rPr sz="825" i="0" b="0" spc="214">
+                <a:solidFill>
+                  <a:srgbClr val="8A867E"/>
+                </a:solidFill>
+                <a:latin typeface="Poppins"/>
+                <a:ea typeface="Poppins"/>
+                <a:cs typeface="Poppins"/>
+              </a:rPr>
+              <a:t>MEDIAN PRICE</a:t>
+            </a:r>
+          </a:p>
+        </p:txBody>
+      </p:sp>
+      <p:sp>
+        <p:nvSpPr>
+          <p:cNvPr id="19" name="TextBox 18"/>
+          <p:cNvSpPr txBox="1"/>
+          <p:nvPr/>
+        </p:nvSpPr>
+        <p:spPr>
+          <a:xfrm>
+            <a:off x="-1905000" y="8977312"/>
+            <a:ext cx="14097000" cy="704850"/>
+          </a:xfrm>
+          <a:prstGeom prst="rect">
+            <a:avLst/>
+          </a:prstGeom>
+          <a:noFill/>
+        </p:spPr>
+        <p:txBody>
+          <a:bodyPr wrap="none" anchor="t" lIns="0" rIns="0" tIns="0" bIns="0"/>
+          <a:lstStyle/>
+          <a:p>
+            <a:pPr algn="ctr"/>
+            <a:r>
+              <a:rPr sz="4800" i="0" b="0">
+                <a:solidFill>
+                  <a:srgbClr val="97A98C"/>
+                </a:solidFill>
+                <a:latin typeface="Cormorant Garamond"/>
+                <a:ea typeface="Cormorant Garamond"/>
+                <a:cs typeface="Cormorant Garamond"/>
+              </a:rPr>
+              <a:t>28 Days</a:t>
+            </a:r>
+          </a:p>
+        </p:txBody>
+      </p:sp>
+      <p:sp>
+        <p:nvSpPr>
+          <p:cNvPr id="20" name="TextBox 19"/>
+          <p:cNvSpPr txBox="1"/>
+          <p:nvPr/>
+        </p:nvSpPr>
+        <p:spPr>
+          <a:xfrm>
+            <a:off x="-1905000" y="9720262"/>
+            <a:ext cx="14097000" cy="161925"/>
+          </a:xfrm>
+          <a:prstGeom prst="rect">
+            <a:avLst/>
+          </a:prstGeom>
+          <a:noFill/>
+        </p:spPr>
+        <p:txBody>
+          <a:bodyPr wrap="none" anchor="t" lIns="0" rIns="0" tIns="0" bIns="0"/>
+          <a:lstStyle/>
+          <a:p>
+            <a:pPr algn="ctr"/>
+            <a:r>
+              <a:rPr sz="825" i="0" b="0" spc="214">
+                <a:solidFill>
+                  <a:srgbClr val="8A867E"/>
+                </a:solidFill>
+                <a:latin typeface="Poppins"/>
+                <a:ea typeface="Poppins"/>
+                <a:cs typeface="Poppins"/>
+              </a:rPr>
+              <a:t>ON MARKET</a:t>
+            </a:r>
+          </a:p>
+        </p:txBody>
+      </p:sp>
+      <p:sp>
+        <p:nvSpPr>
+          <p:cNvPr id="21" name="TextBox 20"/>
+          <p:cNvSpPr txBox="1"/>
+          <p:nvPr/>
+        </p:nvSpPr>
+        <p:spPr>
+          <a:xfrm>
+            <a:off x="-1905000" y="10301288"/>
+            <a:ext cx="14097000" cy="704850"/>
+          </a:xfrm>
+          <a:prstGeom prst="rect">
+            <a:avLst/>
+          </a:prstGeom>
+          <a:noFill/>
+        </p:spPr>
+        <p:txBody>
+          <a:bodyPr wrap="none" anchor="t" lIns="0" rIns="0" tIns="0" bIns="0"/>
+          <a:lstStyle/>
+          <a:p>
+            <a:pPr algn="ctr"/>
+            <a:r>
+              <a:rPr sz="4800" i="0" b="0">
+                <a:solidFill>
+                  <a:srgbClr val="97A98C"/>
+                </a:solidFill>
+                <a:latin typeface="Cormorant Garamond"/>
+                <a:ea typeface="Cormorant Garamond"/>
+                <a:cs typeface="Cormorant Garamond"/>
+              </a:rPr>
+              <a:t>2.4 mo</a:t>
+            </a:r>
+          </a:p>
+        </p:txBody>
+      </p:sp>
+      <p:sp>
+        <p:nvSpPr>
+          <p:cNvPr id="22" name="TextBox 21"/>
+          <p:cNvSpPr txBox="1"/>
+          <p:nvPr/>
+        </p:nvSpPr>
+        <p:spPr>
+          <a:xfrm>
+            <a:off x="-1905000" y="11044238"/>
+            <a:ext cx="14097000" cy="161925"/>
+          </a:xfrm>
+          <a:prstGeom prst="rect">
+            <a:avLst/>
+          </a:prstGeom>
+          <a:noFill/>
+        </p:spPr>
+        <p:txBody>
+          <a:bodyPr wrap="none" anchor="t" lIns="0" rIns="0" tIns="0" bIns="0"/>
+          <a:lstStyle/>
+          <a:p>
+            <a:pPr algn="ctr"/>
+            <a:r>
+              <a:rPr sz="825" i="0" b="0" spc="214">
+                <a:solidFill>
+                  <a:srgbClr val="8A867E"/>
+                </a:solidFill>
+                <a:latin typeface="Poppins"/>
+                <a:ea typeface="Poppins"/>
+                <a:cs typeface="Poppins"/>
+              </a:rPr>
+              <a:t>INVENTORY</a:t>
+            </a:r>
+          </a:p>
+        </p:txBody>
+      </p:sp>
+      <p:sp>
+        <p:nvSpPr>
+          <p:cNvPr id="23" name="TextBox 22"/>
+          <p:cNvSpPr txBox="1"/>
+          <p:nvPr/>
+        </p:nvSpPr>
+        <p:spPr>
+          <a:xfrm>
+            <a:off x="3925788" y="16535400"/>
+            <a:ext cx="2435423" cy="495300"/>
+          </a:xfrm>
+          <a:prstGeom prst="rect">
+            <a:avLst/>
+          </a:prstGeom>
+          <a:noFill/>
+        </p:spPr>
+        <p:txBody>
+          <a:bodyPr wrap="square" anchor="t" lIns="0" rIns="0" tIns="0" bIns="0"/>
+          <a:lstStyle/>
+          <a:p>
+            <a:pPr algn="ctr"/>
+            <a:r>
+              <a:rPr sz="900" i="0" b="0" spc="270">
+                <a:solidFill>
+                  <a:srgbClr val="97A98C"/>
+                </a:solidFill>
+                <a:latin typeface="Poppins"/>
+                <a:ea typeface="Poppins"/>
+                <a:cs typeface="Poppins"/>
+              </a:rPr>
+              <a:t>FULL REPORT IN BIO</a:t>
+            </a:r>
+          </a:p>
+        </p:txBody>
+      </p:sp>
+      <p:sp>
+        <p:nvSpPr>
+          <p:cNvPr id="24" name="TextBox 23"/>
+          <p:cNvSpPr txBox="1"/>
+          <p:nvPr/>
+        </p:nvSpPr>
+        <p:spPr>
+          <a:xfrm>
+            <a:off x="-1905000" y="17278350"/>
+            <a:ext cx="14097000" cy="152400"/>
+          </a:xfrm>
+          <a:prstGeom prst="rect">
+            <a:avLst/>
+          </a:prstGeom>
+          <a:noFill/>
+        </p:spPr>
+        <p:txBody>
+          <a:bodyPr wrap="none" anchor="t" lIns="0" rIns="0" tIns="0" bIns="0"/>
+          <a:lstStyle/>
+          <a:p>
+            <a:pPr algn="ctr"/>
+            <a:r>
+              <a:rPr sz="750" i="0" b="0" spc="210">
+                <a:solidFill>
+                  <a:srgbClr val="8A867E"/>
+                </a:solidFill>
+                <a:latin typeface="Poppins"/>
+                <a:ea typeface="Poppins"/>
+                <a:cs typeface="Poppins"/>
+              </a:rPr>
+              <a:t>@MAYAELLISON · MAYAELLISON.COM</a:t>
+            </a:r>
+          </a:p>
+        </p:txBody>
+      </p:sp>
     </p:spTree>
   </p:cSld>
   <p:clrMapOvr>

--- a/bright-17-story-market.pptx
+++ b/bright-17-story-market.pptx
@@ -3140,7 +3140,7 @@
         </p:nvSpPr>
         <p:spPr>
           <a:xfrm>
-            <a:off x="857250" y="1504950"/>
+            <a:off x="857250" y="1724025"/>
             <a:ext cx="8572500" cy="9525"/>
           </a:xfrm>
           <a:prstGeom prst="rect">
@@ -3184,7 +3184,7 @@
         </p:nvSpPr>
         <p:spPr>
           <a:xfrm>
-            <a:off x="857250" y="866775"/>
+            <a:off x="857250" y="976312"/>
             <a:ext cx="381000" cy="381000"/>
           </a:xfrm>
           <a:prstGeom prst="ellipse">
@@ -3228,7 +3228,7 @@
         </p:nvSpPr>
         <p:spPr>
           <a:xfrm>
-            <a:off x="3201739" y="5457825"/>
+            <a:off x="3042345" y="5486400"/>
             <a:ext cx="666750" cy="9525"/>
           </a:xfrm>
           <a:prstGeom prst="rect">
@@ -3272,7 +3272,7 @@
         </p:nvSpPr>
         <p:spPr>
           <a:xfrm>
-            <a:off x="6418511" y="5457825"/>
+            <a:off x="6577757" y="5486400"/>
             <a:ext cx="666750" cy="9525"/>
           </a:xfrm>
           <a:prstGeom prst="rect">
@@ -3316,8 +3316,8 @@
         </p:nvSpPr>
         <p:spPr>
           <a:xfrm>
-            <a:off x="3385840" y="16221075"/>
-            <a:ext cx="3515320" cy="9525"/>
+            <a:off x="2981771" y="16011525"/>
+            <a:ext cx="4323308" cy="9525"/>
           </a:xfrm>
           <a:prstGeom prst="rect">
             <a:avLst/>
@@ -3360,8 +3360,8 @@
         </p:nvSpPr>
         <p:spPr>
           <a:xfrm>
-            <a:off x="3385840" y="16935450"/>
-            <a:ext cx="3515320" cy="9525"/>
+            <a:off x="2981771" y="16859250"/>
+            <a:ext cx="4323308" cy="9525"/>
           </a:xfrm>
           <a:prstGeom prst="rect">
             <a:avLst/>
@@ -3404,8 +3404,8 @@
         </p:nvSpPr>
         <p:spPr>
           <a:xfrm>
-            <a:off x="3385840" y="16221075"/>
-            <a:ext cx="9525" cy="723900"/>
+            <a:off x="2981771" y="16011525"/>
+            <a:ext cx="9525" cy="857250"/>
           </a:xfrm>
           <a:prstGeom prst="rect">
             <a:avLst/>
@@ -3448,8 +3448,8 @@
         </p:nvSpPr>
         <p:spPr>
           <a:xfrm>
-            <a:off x="6891635" y="16221075"/>
-            <a:ext cx="9525" cy="723900"/>
+            <a:off x="7295555" y="16011525"/>
+            <a:ext cx="9525" cy="857250"/>
           </a:xfrm>
           <a:prstGeom prst="rect">
             <a:avLst/>
@@ -3492,8 +3492,8 @@
         </p:nvSpPr>
         <p:spPr>
           <a:xfrm>
-            <a:off x="919162" y="971550"/>
-            <a:ext cx="792480" cy="171450"/>
+            <a:off x="912019" y="1076325"/>
+            <a:ext cx="815340" cy="180975"/>
           </a:xfrm>
           <a:prstGeom prst="rect">
             <a:avLst/>
@@ -3510,7 +3510,7 @@
               </a:lnSpc>
             </a:pPr>
             <a:r>
-              <a:rPr sz="1350" i="0" b="0">
+              <a:rPr sz="1425" i="0" b="0">
                 <a:solidFill>
                   <a:srgbClr val="97A98C"/>
                 </a:solidFill>
@@ -3532,7 +3532,7 @@
         <p:spPr>
           <a:xfrm>
             <a:off x="1390650" y="857250"/>
-            <a:ext cx="3282315" cy="228600"/>
+            <a:ext cx="5962650" cy="266700"/>
           </a:xfrm>
           <a:prstGeom prst="rect">
             <a:avLst/>
@@ -3549,7 +3549,7 @@
               </a:lnSpc>
             </a:pPr>
             <a:r>
-              <a:rPr sz="1800" i="0" b="0">
+              <a:rPr sz="2100" i="0" b="0">
                 <a:solidFill>
                   <a:srgbClr val="33322E"/>
                 </a:solidFill>
@@ -3570,8 +3570,8 @@
         </p:nvSpPr>
         <p:spPr>
           <a:xfrm>
-            <a:off x="1390650" y="1133475"/>
-            <a:ext cx="3282315" cy="123825"/>
+            <a:off x="1390650" y="1200150"/>
+            <a:ext cx="5962650" cy="276225"/>
           </a:xfrm>
           <a:prstGeom prst="rect">
             <a:avLst/>
@@ -3584,7 +3584,7 @@
           <a:p>
             <a:pPr algn="l"/>
             <a:r>
-              <a:rPr sz="637" i="0" b="0" spc="216">
+              <a:rPr sz="1425" i="0" b="0" spc="313">
                 <a:solidFill>
                   <a:srgbClr val="8A867E"/>
                 </a:solidFill>
@@ -3605,8 +3605,8 @@
         </p:nvSpPr>
         <p:spPr>
           <a:xfrm>
-            <a:off x="3217783" y="5334000"/>
-            <a:ext cx="3851434" cy="257175"/>
+            <a:off x="2962796" y="5334000"/>
+            <a:ext cx="4361259" cy="314325"/>
           </a:xfrm>
           <a:prstGeom prst="rect">
             <a:avLst/>
@@ -3619,7 +3619,7 @@
           <a:p>
             <a:pPr algn="ctr"/>
             <a:r>
-              <a:rPr sz="1350" i="0" b="0" spc="486">
+              <a:rPr sz="1650" i="0" b="0" spc="495">
                 <a:solidFill>
                   <a:srgbClr val="97A98C"/>
                 </a:solidFill>
@@ -3640,7 +3640,7 @@
         </p:nvSpPr>
         <p:spPr>
           <a:xfrm>
-            <a:off x="-1905000" y="5934075"/>
+            <a:off x="-1905000" y="5991225"/>
             <a:ext cx="14097000" cy="923925"/>
           </a:xfrm>
           <a:prstGeom prst="rect">
@@ -3675,8 +3675,8 @@
         </p:nvSpPr>
         <p:spPr>
           <a:xfrm>
-            <a:off x="-1905000" y="6972300"/>
-            <a:ext cx="14097000" cy="238125"/>
+            <a:off x="-1905000" y="7029450"/>
+            <a:ext cx="14097000" cy="276225"/>
           </a:xfrm>
           <a:prstGeom prst="rect">
             <a:avLst/>
@@ -3689,7 +3689,7 @@
           <a:p>
             <a:pPr algn="ctr"/>
             <a:r>
-              <a:rPr sz="1200" i="0" b="0" spc="312">
+              <a:rPr sz="1425" i="0" b="0" spc="313">
                 <a:solidFill>
                   <a:srgbClr val="8A867E"/>
                 </a:solidFill>
@@ -3710,7 +3710,7 @@
         </p:nvSpPr>
         <p:spPr>
           <a:xfrm>
-            <a:off x="-1905000" y="7781925"/>
+            <a:off x="-1905000" y="7877175"/>
             <a:ext cx="14097000" cy="704850"/>
           </a:xfrm>
           <a:prstGeom prst="rect">
@@ -3745,8 +3745,8 @@
         </p:nvSpPr>
         <p:spPr>
           <a:xfrm>
-            <a:off x="-1905000" y="8543925"/>
-            <a:ext cx="14097000" cy="238125"/>
+            <a:off x="-1905000" y="8658225"/>
+            <a:ext cx="14097000" cy="276225"/>
           </a:xfrm>
           <a:prstGeom prst="rect">
             <a:avLst/>
@@ -3759,7 +3759,7 @@
           <a:p>
             <a:pPr algn="ctr"/>
             <a:r>
-              <a:rPr sz="1200" i="0" b="0" spc="264">
+              <a:rPr sz="1425" i="0" b="0" spc="285">
                 <a:solidFill>
                   <a:srgbClr val="8A867E"/>
                 </a:solidFill>
@@ -3780,7 +3780,7 @@
         </p:nvSpPr>
         <p:spPr>
           <a:xfrm>
-            <a:off x="-1905000" y="9201150"/>
+            <a:off x="-1905000" y="9353550"/>
             <a:ext cx="14097000" cy="704850"/>
           </a:xfrm>
           <a:prstGeom prst="rect">
@@ -3815,8 +3815,8 @@
         </p:nvSpPr>
         <p:spPr>
           <a:xfrm>
-            <a:off x="-1905000" y="9963150"/>
-            <a:ext cx="14097000" cy="238125"/>
+            <a:off x="-1905000" y="10134600"/>
+            <a:ext cx="14097000" cy="276225"/>
           </a:xfrm>
           <a:prstGeom prst="rect">
             <a:avLst/>
@@ -3829,7 +3829,7 @@
           <a:p>
             <a:pPr algn="ctr"/>
             <a:r>
-              <a:rPr sz="1200" i="0" b="0" spc="264">
+              <a:rPr sz="1425" i="0" b="0" spc="285">
                 <a:solidFill>
                   <a:srgbClr val="8A867E"/>
                 </a:solidFill>
@@ -3850,7 +3850,7 @@
         </p:nvSpPr>
         <p:spPr>
           <a:xfrm>
-            <a:off x="-1905000" y="10620375"/>
+            <a:off x="-1905000" y="10829925"/>
             <a:ext cx="14097000" cy="704850"/>
           </a:xfrm>
           <a:prstGeom prst="rect">
@@ -3885,8 +3885,8 @@
         </p:nvSpPr>
         <p:spPr>
           <a:xfrm>
-            <a:off x="-1905000" y="11382375"/>
-            <a:ext cx="14097000" cy="238125"/>
+            <a:off x="-1905000" y="11610975"/>
+            <a:ext cx="14097000" cy="276225"/>
           </a:xfrm>
           <a:prstGeom prst="rect">
             <a:avLst/>
@@ -3899,7 +3899,7 @@
           <a:p>
             <a:pPr algn="ctr"/>
             <a:r>
-              <a:rPr sz="1200" i="0" b="0" spc="264">
+              <a:rPr sz="1425" i="0" b="0" spc="285">
                 <a:solidFill>
                   <a:srgbClr val="8A867E"/>
                 </a:solidFill>
@@ -3920,8 +3920,8 @@
         </p:nvSpPr>
         <p:spPr>
           <a:xfrm>
-            <a:off x="3385840" y="16221075"/>
-            <a:ext cx="3515320" cy="723900"/>
+            <a:off x="2981771" y="16011525"/>
+            <a:ext cx="4323308" cy="857250"/>
           </a:xfrm>
           <a:prstGeom prst="rect">
             <a:avLst/>
@@ -3934,7 +3934,7 @@
           <a:p>
             <a:pPr algn="ctr"/>
             <a:r>
-              <a:rPr sz="1500" i="0" b="0" spc="390">
+              <a:rPr sz="2025" i="0" b="0" spc="445">
                 <a:solidFill>
                   <a:srgbClr val="97A98C"/>
                 </a:solidFill>
@@ -3955,8 +3955,8 @@
         </p:nvSpPr>
         <p:spPr>
           <a:xfrm>
-            <a:off x="-1905000" y="17211675"/>
-            <a:ext cx="14097000" cy="219075"/>
+            <a:off x="-1905000" y="17154525"/>
+            <a:ext cx="14097000" cy="276225"/>
           </a:xfrm>
           <a:prstGeom prst="rect">
             <a:avLst/>
@@ -3969,7 +3969,7 @@
           <a:p>
             <a:pPr algn="ctr"/>
             <a:r>
-              <a:rPr sz="1125" i="0" b="0" spc="292">
+              <a:rPr sz="1425" i="0" b="0" spc="313">
                 <a:solidFill>
                   <a:srgbClr val="8A867E"/>
                 </a:solidFill>
